--- a/docs/articles/assets/pptx/gallery_scatter_01.pptx
+++ b/docs/articles/assets/pptx/gallery_scatter_01.pptx
@@ -110,7 +110,7 @@
 </p:presentation>
 </file>
 
-<file path=ppt/charts/chart18455c4d4a23.xml><?xml version="1.0" encoding="utf-8"?>
+<file path=ppt/charts/chart170b4304560d2.xml><?xml version="1.0" encoding="utf-8"?>
 <c:chartSpace xmlns:c="http://schemas.openxmlformats.org/drawingml/2006/chart" xmlns:a="http://schemas.openxmlformats.org/drawingml/2006/main" xmlns:r="http://schemas.openxmlformats.org/officeDocument/2006/relationships">
   <c:date1904 val="0"/>
   <c:lang val="fr-FR"/>
@@ -124,7 +124,7 @@
     </mc:Fallback>
   </mc:AlternateContent>
   <c:chart>
-    <c:autoTitleDeleted val="0"/>
+    <c:autoTitleDeleted val="1"/>
     <c:plotArea xmlns:c="http://schemas.openxmlformats.org/drawingml/2006/chart" xmlns:a="http://schemas.openxmlformats.org/drawingml/2006/main" xmlns:r="http://schemas.openxmlformats.org/officeDocument/2006/relationships">
       <c:layout/>
       <c:scatterChart>
@@ -170,6 +170,7 @@
                   </a:srgbClr>
                 </a:solidFill>
               </a:ln>
+              <a:effectLst/>
             </c:spPr>
           </c:marker>
           <c:dLbls>
@@ -179,7 +180,7 @@
               <a:lstStyle/>
               <a:p>
                 <a:pPr>
-                  <a:defRPr>
+                  <a:defRPr cap="none">
                     <a:solidFill>
                       <a:srgbClr val="000000">
                         <a:alpha val="100000"/>
@@ -374,6 +375,7 @@
                   </a:srgbClr>
                 </a:solidFill>
               </a:ln>
+              <a:effectLst/>
             </c:spPr>
           </c:marker>
           <c:dLbls>
@@ -383,7 +385,7 @@
               <a:lstStyle/>
               <a:p>
                 <a:pPr>
-                  <a:defRPr>
+                  <a:defRPr cap="none">
                     <a:solidFill>
                       <a:srgbClr val="000000">
                         <a:alpha val="100000"/>
@@ -572,6 +574,7 @@
                   </a:srgbClr>
                 </a:solidFill>
               </a:ln>
+              <a:effectLst/>
             </c:spPr>
           </c:marker>
           <c:dLbls>
@@ -581,7 +584,7 @@
               <a:lstStyle/>
               <a:p>
                 <a:pPr>
-                  <a:defRPr>
+                  <a:defRPr cap="none">
                     <a:solidFill>
                       <a:srgbClr val="000000">
                         <a:alpha val="100000"/>
@@ -760,7 +763,7 @@
                   <a:defRPr/>
                 </a:pPr>
                 <a:r>
-                  <a:rPr sz="1600" b="1">
+                  <a:rPr cap="none" sz="1600" b="1">
                     <a:solidFill>
                       <a:srgbClr val="000000">
                         <a:alpha val="100000"/>
@@ -785,7 +788,7 @@
           <a:lstStyle/>
           <a:p>
             <a:pPr>
-              <a:defRPr sz="1000">
+              <a:defRPr cap="none" sz="1000">
                 <a:solidFill>
                   <a:srgbClr val="000000">
                     <a:alpha val="100000"/>
@@ -842,7 +845,7 @@
                   <a:defRPr/>
                 </a:pPr>
                 <a:r>
-                  <a:rPr sz="1600" b="1">
+                  <a:rPr cap="none" sz="1600" b="1">
                     <a:solidFill>
                       <a:srgbClr val="000000">
                         <a:alpha val="100000"/>
@@ -867,7 +870,7 @@
           <a:lstStyle/>
           <a:p>
             <a:pPr>
-              <a:defRPr sz="1000">
+              <a:defRPr cap="none" sz="1000">
                 <a:solidFill>
                   <a:srgbClr val="000000">
                     <a:alpha val="100000"/>
@@ -903,7 +906,7 @@
         <a:lstStyle/>
         <a:p>
           <a:pPr>
-            <a:defRPr sz="1400">
+            <a:defRPr cap="none" sz="1400">
               <a:solidFill>
                 <a:srgbClr val="000000">
                   <a:alpha val="100000"/>
